--- a/chapter3/parts/part-02-core-ethical-principles/clip.pptx
+++ b/chapter3/parts/part-02-core-ethical-principles/clip.pptx
@@ -4384,7 +4384,7 @@
               </a:defRPr>
             </a:pPr>
             <a:r>
-              <a:t>Chapter 3 — 02 Core Ethical Principles</a:t>
+              <a:t>Chapter 3 — Core Ethical Principles</a:t>
             </a:r>
           </a:p>
         </p:txBody>
@@ -4583,7 +4583,7 @@
               </a:defRPr>
             </a:pPr>
             <a:r>
-              <a:t>Chapter 3 — 02 Core Ethical Principles</a:t>
+              <a:t>Chapter 3 — Core Ethical Principles</a:t>
             </a:r>
           </a:p>
         </p:txBody>
@@ -4782,7 +4782,7 @@
               </a:defRPr>
             </a:pPr>
             <a:r>
-              <a:t>Chapter 3 — 02 Core Ethical Principles</a:t>
+              <a:t>Chapter 3 — Core Ethical Principles</a:t>
             </a:r>
           </a:p>
         </p:txBody>
@@ -4941,7 +4941,7 @@
               </a:defRPr>
             </a:pPr>
             <a:r>
-              <a:t>Chapter 3 — 02 Core Ethical Principles</a:t>
+              <a:t>Chapter 3 — Core Ethical Principles</a:t>
             </a:r>
           </a:p>
         </p:txBody>
@@ -5100,7 +5100,7 @@
               </a:defRPr>
             </a:pPr>
             <a:r>
-              <a:t>Chapter 3 — 02 Core Ethical Principles</a:t>
+              <a:t>Chapter 3 — Core Ethical Principles</a:t>
             </a:r>
           </a:p>
         </p:txBody>
@@ -5319,7 +5319,7 @@
               </a:defRPr>
             </a:pPr>
             <a:r>
-              <a:t>Chapter 3 — 02 Core Ethical Principles</a:t>
+              <a:t>Chapter 3 — Core Ethical Principles</a:t>
             </a:r>
           </a:p>
         </p:txBody>
@@ -5498,7 +5498,7 @@
               </a:defRPr>
             </a:pPr>
             <a:r>
-              <a:t>Chapter 3 — 02 Core Ethical Principles</a:t>
+              <a:t>Chapter 3 — Core Ethical Principles</a:t>
             </a:r>
           </a:p>
         </p:txBody>
@@ -5697,7 +5697,7 @@
               </a:defRPr>
             </a:pPr>
             <a:r>
-              <a:t>Chapter 3 — 02 Core Ethical Principles</a:t>
+              <a:t>Chapter 3 — Core Ethical Principles</a:t>
             </a:r>
           </a:p>
         </p:txBody>
@@ -5876,7 +5876,7 @@
               </a:defRPr>
             </a:pPr>
             <a:r>
-              <a:t>Chapter 3 — 02 Core Ethical Principles</a:t>
+              <a:t>Chapter 3 — Core Ethical Principles</a:t>
             </a:r>
           </a:p>
         </p:txBody>
@@ -6095,7 +6095,7 @@
               </a:defRPr>
             </a:pPr>
             <a:r>
-              <a:t>Chapter 3 — 02 Core Ethical Principles</a:t>
+              <a:t>Chapter 3 — Core Ethical Principles</a:t>
             </a:r>
           </a:p>
         </p:txBody>
@@ -6274,7 +6274,7 @@
               </a:defRPr>
             </a:pPr>
             <a:r>
-              <a:t>Chapter 3 — 02 Core Ethical Principles</a:t>
+              <a:t>Chapter 3 — Core Ethical Principles</a:t>
             </a:r>
           </a:p>
         </p:txBody>
@@ -6453,7 +6453,7 @@
               </a:defRPr>
             </a:pPr>
             <a:r>
-              <a:t>Chapter 3 — 02 Core Ethical Principles</a:t>
+              <a:t>Chapter 3 — Core Ethical Principles</a:t>
             </a:r>
           </a:p>
         </p:txBody>

--- a/chapter3/parts/part-02-core-ethical-principles/clip.pptx
+++ b/chapter3/parts/part-02-core-ethical-principles/clip.pptx
@@ -4468,10 +4468,12 @@
           </a:bodyPr>
           <a:lstStyle/>
           <a:p>
-            <a:pPr>
+            <a:pPr lvl="0" marL="457200" indent="-228600">
+              <a:buFont typeface="Calibri"/>
               <a:spcAft>
                 <a:spcPts val="1000"/>
               </a:spcAft>
+              <a:buSzPct val="100000"/>
               <a:buChar char="•"/>
               <a:lnSpc>
                 <a:spcPts val="2200"/>
@@ -4488,10 +4490,12 @@
             </a:r>
           </a:p>
           <a:p>
-            <a:pPr>
+            <a:pPr lvl="0" marL="457200" indent="-228600">
+              <a:buFont typeface="Calibri"/>
               <a:spcAft>
                 <a:spcPts val="1000"/>
               </a:spcAft>
+              <a:buSzPct val="100000"/>
               <a:buChar char="•"/>
               <a:lnSpc>
                 <a:spcPts val="2200"/>
@@ -4508,10 +4512,12 @@
             </a:r>
           </a:p>
           <a:p>
-            <a:pPr>
+            <a:pPr lvl="0" marL="457200" indent="-228600">
+              <a:buFont typeface="Calibri"/>
               <a:spcAft>
                 <a:spcPts val="1000"/>
               </a:spcAft>
+              <a:buSzPct val="100000"/>
               <a:buChar char="•"/>
               <a:lnSpc>
                 <a:spcPts val="2200"/>
@@ -4528,10 +4534,12 @@
             </a:r>
           </a:p>
           <a:p>
-            <a:pPr>
+            <a:pPr lvl="0" marL="457200" indent="-228600">
+              <a:buFont typeface="Calibri"/>
               <a:spcAft>
                 <a:spcPts val="1000"/>
               </a:spcAft>
+              <a:buSzPct val="100000"/>
               <a:buChar char="•"/>
               <a:lnSpc>
                 <a:spcPts val="2200"/>
@@ -4667,10 +4675,12 @@
           </a:bodyPr>
           <a:lstStyle/>
           <a:p>
-            <a:pPr>
+            <a:pPr lvl="0" marL="457200" indent="-228600">
+              <a:buFont typeface="Calibri"/>
               <a:spcAft>
                 <a:spcPts val="1000"/>
               </a:spcAft>
+              <a:buSzPct val="100000"/>
               <a:buChar char="•"/>
               <a:lnSpc>
                 <a:spcPts val="2200"/>
@@ -4687,10 +4697,12 @@
             </a:r>
           </a:p>
           <a:p>
-            <a:pPr>
+            <a:pPr lvl="0" marL="457200" indent="-228600">
+              <a:buFont typeface="Calibri"/>
               <a:spcAft>
                 <a:spcPts val="1000"/>
               </a:spcAft>
+              <a:buSzPct val="100000"/>
               <a:buChar char="•"/>
               <a:lnSpc>
                 <a:spcPts val="2200"/>
@@ -4707,10 +4719,12 @@
             </a:r>
           </a:p>
           <a:p>
-            <a:pPr>
+            <a:pPr lvl="0" marL="457200" indent="-228600">
+              <a:buFont typeface="Calibri"/>
               <a:spcAft>
                 <a:spcPts val="1000"/>
               </a:spcAft>
+              <a:buSzPct val="100000"/>
               <a:buChar char="•"/>
               <a:lnSpc>
                 <a:spcPts val="2200"/>
@@ -4727,10 +4741,12 @@
             </a:r>
           </a:p>
           <a:p>
-            <a:pPr>
+            <a:pPr lvl="0" marL="457200" indent="-228600">
+              <a:buFont typeface="Calibri"/>
               <a:spcAft>
                 <a:spcPts val="1000"/>
               </a:spcAft>
+              <a:buSzPct val="100000"/>
               <a:buChar char="•"/>
               <a:lnSpc>
                 <a:spcPts val="2200"/>
@@ -4866,10 +4882,12 @@
           </a:bodyPr>
           <a:lstStyle/>
           <a:p>
-            <a:pPr>
+            <a:pPr lvl="0" marL="457200" indent="-228600">
+              <a:buFont typeface="Calibri"/>
               <a:spcAft>
                 <a:spcPts val="1000"/>
               </a:spcAft>
+              <a:buSzPct val="100000"/>
               <a:buChar char="•"/>
               <a:lnSpc>
                 <a:spcPts val="2200"/>
@@ -4886,10 +4904,12 @@
             </a:r>
           </a:p>
           <a:p>
-            <a:pPr>
+            <a:pPr lvl="0" marL="457200" indent="-228600">
+              <a:buFont typeface="Calibri"/>
               <a:spcAft>
                 <a:spcPts val="1000"/>
               </a:spcAft>
+              <a:buSzPct val="100000"/>
               <a:buChar char="•"/>
               <a:lnSpc>
                 <a:spcPts val="2200"/>
@@ -5025,10 +5045,12 @@
           </a:bodyPr>
           <a:lstStyle/>
           <a:p>
-            <a:pPr>
+            <a:pPr lvl="0" marL="457200" indent="-228600">
+              <a:buFont typeface="Calibri"/>
               <a:spcAft>
                 <a:spcPts val="1000"/>
               </a:spcAft>
+              <a:buSzPct val="100000"/>
               <a:buChar char="•"/>
               <a:lnSpc>
                 <a:spcPts val="2200"/>
@@ -5045,10 +5067,12 @@
             </a:r>
           </a:p>
           <a:p>
-            <a:pPr>
+            <a:pPr lvl="0" marL="457200" indent="-228600">
+              <a:buFont typeface="Calibri"/>
               <a:spcAft>
                 <a:spcPts val="1000"/>
               </a:spcAft>
+              <a:buSzPct val="100000"/>
               <a:buChar char="•"/>
               <a:lnSpc>
                 <a:spcPts val="2200"/>
@@ -5184,10 +5208,12 @@
           </a:bodyPr>
           <a:lstStyle/>
           <a:p>
-            <a:pPr>
+            <a:pPr lvl="0" marL="457200" indent="-228600">
+              <a:buFont typeface="Calibri"/>
               <a:spcAft>
                 <a:spcPts val="1000"/>
               </a:spcAft>
+              <a:buSzPct val="100000"/>
               <a:buChar char="•"/>
               <a:lnSpc>
                 <a:spcPts val="2200"/>
@@ -5204,10 +5230,12 @@
             </a:r>
           </a:p>
           <a:p>
-            <a:pPr>
+            <a:pPr lvl="0" marL="457200" indent="-228600">
+              <a:buFont typeface="Calibri"/>
               <a:spcAft>
                 <a:spcPts val="1000"/>
               </a:spcAft>
+              <a:buSzPct val="100000"/>
               <a:buChar char="•"/>
               <a:lnSpc>
                 <a:spcPts val="2200"/>
@@ -5224,10 +5252,12 @@
             </a:r>
           </a:p>
           <a:p>
-            <a:pPr>
+            <a:pPr lvl="0" marL="457200" indent="-228600">
+              <a:buFont typeface="Calibri"/>
               <a:spcAft>
                 <a:spcPts val="1000"/>
               </a:spcAft>
+              <a:buSzPct val="100000"/>
               <a:buChar char="•"/>
               <a:lnSpc>
                 <a:spcPts val="2200"/>
@@ -5244,10 +5274,12 @@
             </a:r>
           </a:p>
           <a:p>
-            <a:pPr>
+            <a:pPr lvl="0" marL="457200" indent="-228600">
+              <a:buFont typeface="Calibri"/>
               <a:spcAft>
                 <a:spcPts val="1000"/>
               </a:spcAft>
+              <a:buSzPct val="100000"/>
               <a:buChar char="•"/>
               <a:lnSpc>
                 <a:spcPts val="2200"/>
@@ -5264,10 +5296,12 @@
             </a:r>
           </a:p>
           <a:p>
-            <a:pPr>
+            <a:pPr lvl="0" marL="457200" indent="-228600">
+              <a:buFont typeface="Calibri"/>
               <a:spcAft>
                 <a:spcPts val="1000"/>
               </a:spcAft>
+              <a:buSzPct val="100000"/>
               <a:buChar char="•"/>
               <a:lnSpc>
                 <a:spcPts val="2200"/>
@@ -5403,10 +5437,12 @@
           </a:bodyPr>
           <a:lstStyle/>
           <a:p>
-            <a:pPr>
+            <a:pPr lvl="0" marL="457200" indent="-228600">
+              <a:buFont typeface="Calibri"/>
               <a:spcAft>
                 <a:spcPts val="1000"/>
               </a:spcAft>
+              <a:buSzPct val="100000"/>
               <a:buChar char="•"/>
               <a:lnSpc>
                 <a:spcPts val="2200"/>
@@ -5423,10 +5459,12 @@
             </a:r>
           </a:p>
           <a:p>
-            <a:pPr>
+            <a:pPr lvl="0" marL="457200" indent="-228600">
+              <a:buFont typeface="Calibri"/>
               <a:spcAft>
                 <a:spcPts val="1000"/>
               </a:spcAft>
+              <a:buSzPct val="100000"/>
               <a:buChar char="•"/>
               <a:lnSpc>
                 <a:spcPts val="2200"/>
@@ -5443,10 +5481,12 @@
             </a:r>
           </a:p>
           <a:p>
-            <a:pPr>
+            <a:pPr lvl="0" marL="457200" indent="-228600">
+              <a:buFont typeface="Calibri"/>
               <a:spcAft>
                 <a:spcPts val="1000"/>
               </a:spcAft>
+              <a:buSzPct val="100000"/>
               <a:buChar char="•"/>
               <a:lnSpc>
                 <a:spcPts val="2200"/>
@@ -5582,10 +5622,12 @@
           </a:bodyPr>
           <a:lstStyle/>
           <a:p>
-            <a:pPr>
+            <a:pPr lvl="0" marL="457200" indent="-228600">
+              <a:buFont typeface="Calibri"/>
               <a:spcAft>
                 <a:spcPts val="1000"/>
               </a:spcAft>
+              <a:buSzPct val="100000"/>
               <a:buChar char="•"/>
               <a:lnSpc>
                 <a:spcPts val="2200"/>
@@ -5602,10 +5644,12 @@
             </a:r>
           </a:p>
           <a:p>
-            <a:pPr>
+            <a:pPr lvl="0" marL="457200" indent="-228600">
+              <a:buFont typeface="Calibri"/>
               <a:spcAft>
                 <a:spcPts val="1000"/>
               </a:spcAft>
+              <a:buSzPct val="100000"/>
               <a:buChar char="•"/>
               <a:lnSpc>
                 <a:spcPts val="2200"/>
@@ -5622,10 +5666,12 @@
             </a:r>
           </a:p>
           <a:p>
-            <a:pPr>
+            <a:pPr lvl="0" marL="457200" indent="-228600">
+              <a:buFont typeface="Calibri"/>
               <a:spcAft>
                 <a:spcPts val="1000"/>
               </a:spcAft>
+              <a:buSzPct val="100000"/>
               <a:buChar char="•"/>
               <a:lnSpc>
                 <a:spcPts val="2200"/>
@@ -5642,10 +5688,12 @@
             </a:r>
           </a:p>
           <a:p>
-            <a:pPr>
+            <a:pPr lvl="0" marL="457200" indent="-228600">
+              <a:buFont typeface="Calibri"/>
               <a:spcAft>
                 <a:spcPts val="1000"/>
               </a:spcAft>
+              <a:buSzPct val="100000"/>
               <a:buChar char="•"/>
               <a:lnSpc>
                 <a:spcPts val="2200"/>
@@ -5781,10 +5829,12 @@
           </a:bodyPr>
           <a:lstStyle/>
           <a:p>
-            <a:pPr>
+            <a:pPr lvl="0" marL="457200" indent="-228600">
+              <a:buFont typeface="Calibri"/>
               <a:spcAft>
                 <a:spcPts val="1000"/>
               </a:spcAft>
+              <a:buSzPct val="100000"/>
               <a:buChar char="•"/>
               <a:lnSpc>
                 <a:spcPts val="2200"/>
@@ -5801,10 +5851,12 @@
             </a:r>
           </a:p>
           <a:p>
-            <a:pPr>
+            <a:pPr lvl="0" marL="457200" indent="-228600">
+              <a:buFont typeface="Calibri"/>
               <a:spcAft>
                 <a:spcPts val="1000"/>
               </a:spcAft>
+              <a:buSzPct val="100000"/>
               <a:buChar char="•"/>
               <a:lnSpc>
                 <a:spcPts val="2200"/>
@@ -5821,10 +5873,12 @@
             </a:r>
           </a:p>
           <a:p>
-            <a:pPr>
+            <a:pPr lvl="0" marL="457200" indent="-228600">
+              <a:buFont typeface="Calibri"/>
               <a:spcAft>
                 <a:spcPts val="1000"/>
               </a:spcAft>
+              <a:buSzPct val="100000"/>
               <a:buChar char="•"/>
               <a:lnSpc>
                 <a:spcPts val="2200"/>
@@ -5960,10 +6014,12 @@
           </a:bodyPr>
           <a:lstStyle/>
           <a:p>
-            <a:pPr>
+            <a:pPr lvl="0" marL="457200" indent="-228600">
+              <a:buFont typeface="Calibri"/>
               <a:spcAft>
                 <a:spcPts val="1000"/>
               </a:spcAft>
+              <a:buSzPct val="100000"/>
               <a:buChar char="•"/>
               <a:lnSpc>
                 <a:spcPts val="2200"/>
@@ -5980,10 +6036,12 @@
             </a:r>
           </a:p>
           <a:p>
-            <a:pPr>
+            <a:pPr lvl="0" marL="457200" indent="-228600">
+              <a:buFont typeface="Calibri"/>
               <a:spcAft>
                 <a:spcPts val="1000"/>
               </a:spcAft>
+              <a:buSzPct val="100000"/>
               <a:buChar char="•"/>
               <a:lnSpc>
                 <a:spcPts val="2200"/>
@@ -6000,10 +6058,12 @@
             </a:r>
           </a:p>
           <a:p>
-            <a:pPr>
+            <a:pPr lvl="0" marL="457200" indent="-228600">
+              <a:buFont typeface="Calibri"/>
               <a:spcAft>
                 <a:spcPts val="1000"/>
               </a:spcAft>
+              <a:buSzPct val="100000"/>
               <a:buChar char="•"/>
               <a:lnSpc>
                 <a:spcPts val="2200"/>
@@ -6020,10 +6080,12 @@
             </a:r>
           </a:p>
           <a:p>
-            <a:pPr>
+            <a:pPr lvl="0" marL="457200" indent="-228600">
+              <a:buFont typeface="Calibri"/>
               <a:spcAft>
                 <a:spcPts val="1000"/>
               </a:spcAft>
+              <a:buSzPct val="100000"/>
               <a:buChar char="•"/>
               <a:lnSpc>
                 <a:spcPts val="2200"/>
@@ -6040,10 +6102,12 @@
             </a:r>
           </a:p>
           <a:p>
-            <a:pPr>
+            <a:pPr lvl="0" marL="457200" indent="-228600">
+              <a:buFont typeface="Calibri"/>
               <a:spcAft>
                 <a:spcPts val="1000"/>
               </a:spcAft>
+              <a:buSzPct val="100000"/>
               <a:buChar char="•"/>
               <a:lnSpc>
                 <a:spcPts val="2200"/>
@@ -6179,10 +6243,12 @@
           </a:bodyPr>
           <a:lstStyle/>
           <a:p>
-            <a:pPr>
+            <a:pPr lvl="0" marL="457200" indent="-228600">
+              <a:buFont typeface="Calibri"/>
               <a:spcAft>
                 <a:spcPts val="1000"/>
               </a:spcAft>
+              <a:buSzPct val="100000"/>
               <a:buChar char="•"/>
               <a:lnSpc>
                 <a:spcPts val="2200"/>
@@ -6199,10 +6265,12 @@
             </a:r>
           </a:p>
           <a:p>
-            <a:pPr>
+            <a:pPr lvl="0" marL="457200" indent="-228600">
+              <a:buFont typeface="Calibri"/>
               <a:spcAft>
                 <a:spcPts val="1000"/>
               </a:spcAft>
+              <a:buSzPct val="100000"/>
               <a:buChar char="•"/>
               <a:lnSpc>
                 <a:spcPts val="2200"/>
@@ -6219,10 +6287,12 @@
             </a:r>
           </a:p>
           <a:p>
-            <a:pPr>
+            <a:pPr lvl="0" marL="457200" indent="-228600">
+              <a:buFont typeface="Calibri"/>
               <a:spcAft>
                 <a:spcPts val="1000"/>
               </a:spcAft>
+              <a:buSzPct val="100000"/>
               <a:buChar char="•"/>
               <a:lnSpc>
                 <a:spcPts val="2200"/>
@@ -6358,10 +6428,12 @@
           </a:bodyPr>
           <a:lstStyle/>
           <a:p>
-            <a:pPr>
+            <a:pPr lvl="0" marL="457200" indent="-228600">
+              <a:buFont typeface="Calibri"/>
               <a:spcAft>
                 <a:spcPts val="1000"/>
               </a:spcAft>
+              <a:buSzPct val="100000"/>
               <a:buChar char="•"/>
               <a:lnSpc>
                 <a:spcPts val="2200"/>
@@ -6378,10 +6450,12 @@
             </a:r>
           </a:p>
           <a:p>
-            <a:pPr>
+            <a:pPr lvl="0" marL="457200" indent="-228600">
+              <a:buFont typeface="Calibri"/>
               <a:spcAft>
                 <a:spcPts val="1000"/>
               </a:spcAft>
+              <a:buSzPct val="100000"/>
               <a:buChar char="•"/>
               <a:lnSpc>
                 <a:spcPts val="2200"/>
@@ -6398,10 +6472,12 @@
             </a:r>
           </a:p>
           <a:p>
-            <a:pPr>
+            <a:pPr lvl="0" marL="457200" indent="-228600">
+              <a:buFont typeface="Calibri"/>
               <a:spcAft>
                 <a:spcPts val="1000"/>
               </a:spcAft>
+              <a:buSzPct val="100000"/>
               <a:buChar char="•"/>
               <a:lnSpc>
                 <a:spcPts val="2200"/>
